--- a/decks/geog-asia-china/geog-asia-china_ch3_population.pptx
+++ b/decks/geog-asia-china/geog-asia-china_ch3_population.pptx
@@ -123,30 +123,30 @@
   <p:extLst>
     <p:ext uri="{521415D9-36F7-43E2-AB2F-B90AF26B5E84}">
       <p14:sectionLst xmlns:p14="http://schemas.microsoft.com/office/powerpoint/2010/main">
-        <p14:section name="Opening" id="{ffeca722-0d2c-4290-cdba-320aa60d5f11}">
+        <p14:section name="Opening" id="{951b82d1-1891-3889-bc79-f70642b63bea}">
           <p14:sldIdLst>
             <p14:sldId id="256"/>
           </p14:sldIdLst>
         </p14:section>
-        <p14:section name="Gate" id="{dea25ac0-0f3a-1d7e-48a0-80b0bbbbf5ad}">
+        <p14:section name="Gate" id="{6fa8c9ec-69f6-4762-0b74-c8bd4f975b74}">
           <p14:sldIdLst>
             <p14:sldId id="257"/>
             <p14:sldId id="258"/>
           </p14:sldIdLst>
         </p14:section>
-        <p14:section name="Pre-teach" id="{469d162e-7a76-0628-ad51-60a48bda6c42}">
+        <p14:section name="Pre-teach" id="{5ec31992-19aa-82b2-72b8-47f07e4f364c}">
           <p14:sldIdLst>
             <p14:sldId id="259"/>
             <p14:sldId id="260"/>
           </p14:sldIdLst>
         </p14:section>
-        <p14:section name="Read-along" id="{596192d6-dd65-0f99-805b-d0fa69f91c1d}">
+        <p14:section name="Read-along" id="{4f295a79-9488-281d-dd61-3e0d6eaeb8f2}">
           <p14:sldIdLst>
             <p14:sldId id="261"/>
             <p14:sldId id="262"/>
           </p14:sldIdLst>
         </p14:section>
-        <p14:section name="Teach" id="{9240c7a0-e47d-8ed8-e857-aadbcaf5e188}">
+        <p14:section name="Teach" id="{e91e3d29-5c12-d6d2-0597-f8d566a6af32}">
           <p14:sldIdLst>
             <p14:sldId id="263"/>
             <p14:sldId id="264"/>
@@ -154,18 +154,18 @@
             <p14:sldId id="266"/>
           </p14:sldIdLst>
         </p14:section>
-        <p14:section name="Routes" id="{b0f448cc-e5c1-57c1-a2ea-bcf4a38460db}">
+        <p14:section name="Routes" id="{006d8748-e072-ab9a-be9d-142714d065cf}">
           <p14:sldIdLst>
             <p14:sldId id="267"/>
             <p14:sldId id="268"/>
           </p14:sldIdLst>
         </p14:section>
-        <p14:section name="Close" id="{860870e2-4f44-b7cf-c494-64a8b0e632e9}">
+        <p14:section name="Close" id="{8d8d8535-ba6a-6b2d-d484-6177dc1153c3}">
           <p14:sldIdLst>
             <p14:sldId id="269"/>
           </p14:sldIdLst>
         </p14:section>
-        <p14:section name="Answers" id="{f7919876-a317-b75e-0819-785a3fbb30c2}">
+        <p14:section name="Answers" id="{fa651a55-5866-9574-2b6b-b77ff663f283}">
           <p14:sldIdLst>
             <p14:sldId id="270"/>
             <p14:sldId id="271"/>
